--- a/outputs/PPT4_Unit4_Bayes_Theorem.pptx
+++ b/outputs/PPT4_Unit4_Bayes_Theorem.pptx
@@ -1907,7 +1907,7 @@
                 <a:ea typeface="Arial" pitchFamily="34" charset="-122"/>
                 <a:cs typeface="Arial" pitchFamily="34" charset="-120"/>
               </a:rPr>
-              <a:t>NAME :   SRinivas Rao Tammireddy</a:t>
+              <a:t>NAME :   Srinivas Rao Tammireddy</a:t>
             </a:r>
             <a:endParaRPr lang="en-US" sz="1200" dirty="0"/>
           </a:p>
